--- a/presentation.pptx
+++ b/presentation.pptx
@@ -3889,7 +3889,7 @@
                 <a:ea typeface="Calibri" pitchFamily="34" charset="-122"/>
                 <a:cs typeface="Calibri" pitchFamily="34" charset="-120"/>
               </a:rPr>
-              <a:t>Generated from ablation/results/all_runs.csv.</a:t>
+              <a:t>A1 no ConvLSTM = 0.7272; A3 no attention = 0.7244. Main recovery comes from A2.</a:t>
             </a:r>
             <a:endParaRPr lang="en-US" sz="900" dirty="0"/>
           </a:p>
